--- a/Javafirstprog/src/PPt1.pptx
+++ b/Javafirstprog/src/PPt1.pptx
@@ -3396,10 +3396,7 @@
           <a:bodyPr/>
           <a:lstStyle/>
           <a:p>
-            <a:r>
-              <a:rPr lang="en-IN" dirty="0"/>
-              <a:t>Branch2</a:t>
-            </a:r>
+            <a:endParaRPr lang="en-IN" dirty="0"/>
           </a:p>
         </p:txBody>
       </p:sp>
